--- a/12/answers/Class12_rp17-7C_02.pptx
+++ b/12/answers/Class12_rp17-7C_02.pptx
@@ -2,16 +2,16 @@
 <file path=ppt/presentation.xml><?xml version="1.0" encoding="utf-8"?>
 <p:presentation xmlns:p="http://schemas.openxmlformats.org/presentationml/2006/main">
   <p:sldMasterIdLst>
-    <p:sldMasterId xmlns:r="http://schemas.openxmlformats.org/officeDocument/2006/relationships" id="2147483648" r:id="Rc648c6680d284c9c"/>
+    <p:sldMasterId xmlns:r="http://schemas.openxmlformats.org/officeDocument/2006/relationships" id="2147483648" r:id="R29b01a8c16a148a1"/>
   </p:sldMasterIdLst>
   <p:notesMasterIdLst>
-    <p:notesMasterId xmlns:r="http://schemas.openxmlformats.org/officeDocument/2006/relationships" r:id="R52a1019eafcb433f"/>
+    <p:notesMasterId xmlns:r="http://schemas.openxmlformats.org/officeDocument/2006/relationships" r:id="R2b4e7bef3a654cd4"/>
   </p:notesMasterIdLst>
   <p:sldIdLst>
-    <p:sldId xmlns:r="http://schemas.openxmlformats.org/officeDocument/2006/relationships" id="256" r:id="Ra1298444c46a414d"/>
-    <p:sldId xmlns:r="http://schemas.openxmlformats.org/officeDocument/2006/relationships" id="257" r:id="R6ea22fb999274f48"/>
-    <p:sldId xmlns:r="http://schemas.openxmlformats.org/officeDocument/2006/relationships" id="258" r:id="R61a96ab7b38e4767"/>
-    <p:sldId xmlns:r="http://schemas.openxmlformats.org/officeDocument/2006/relationships" id="259" r:id="R03d3938120ad4f72"/>
+    <p:sldId xmlns:r="http://schemas.openxmlformats.org/officeDocument/2006/relationships" id="256" r:id="R090fd05bc8c44833"/>
+    <p:sldId xmlns:r="http://schemas.openxmlformats.org/officeDocument/2006/relationships" id="257" r:id="R5f1f97c1258f4d22"/>
+    <p:sldId xmlns:r="http://schemas.openxmlformats.org/officeDocument/2006/relationships" id="258" r:id="Rdeb5135c72494fcf"/>
+    <p:sldId xmlns:r="http://schemas.openxmlformats.org/officeDocument/2006/relationships" id="259" r:id="R72341b57332d4b2b"/>
   </p:sldIdLst>
   <p:sldSz cx="12192000" cy="6858000"/>
   <p:notesSz cx="6858000" cy="9144000"/>
@@ -802,7 +802,7 @@
   </p:cSld>
   <p:clrMap bg1="lt1" tx1="dk1" bg2="lt2" tx2="dk2" accent1="accent1" accent2="accent2" accent3="accent3" accent4="accent4" accent5="accent5" accent6="accent6" hlink="hlink" folHlink="folHlink"/>
   <p:sldLayoutIdLst>
-    <p:sldLayoutId xmlns:r="http://schemas.openxmlformats.org/officeDocument/2006/relationships" id="2147483649" r:id="R8bd4936a16e64562"/>
+    <p:sldLayoutId xmlns:r="http://schemas.openxmlformats.org/officeDocument/2006/relationships" id="2147483649" r:id="R5ab2c26b9bde4257"/>
   </p:sldLayoutIdLst>
   <p:txStyles>
     <p:titleStyle>
@@ -1353,7 +1353,7 @@
           <p:cNvPr id="1" name="">
             <a:extLst xmlns:a="http://schemas.openxmlformats.org/drawingml/2006/main">
               <a:ext uri="{FF2B5EF4-FFF2-40B4-BE49-F238E27FC236}">
-                <a16:creationId xmlns:a16="http://schemas.microsoft.com/office/drawing/2014/main" id="{EF0D98C3-395F-4C34-8A5B-89AF39E442B4}"/>
+                <a16:creationId xmlns:a16="http://schemas.microsoft.com/office/drawing/2014/main" id="{F207AC70-2A16-4B29-8166-78E623B57006}"/>
               </a:ext>
             </a:extLst>
           </p:cNvPr>
@@ -1403,7 +1403,7 @@
           <p:cNvPr id="2" name="">
             <a:extLst xmlns:a="http://schemas.openxmlformats.org/drawingml/2006/main">
               <a:ext uri="{FF2B5EF4-FFF2-40B4-BE49-F238E27FC236}">
-                <a16:creationId xmlns:a16="http://schemas.microsoft.com/office/drawing/2014/main" id="{5FDA8809-4B8B-48F2-80EA-6FC5E5452385}"/>
+                <a16:creationId xmlns:a16="http://schemas.microsoft.com/office/drawing/2014/main" id="{F897C5CD-0C79-4E8B-86A2-CAC98AAAEAAE}"/>
               </a:ext>
             </a:extLst>
           </p:cNvPr>
@@ -1453,7 +1453,7 @@
           <p:cNvPr id="3" name="">
             <a:extLst xmlns:a="http://schemas.openxmlformats.org/drawingml/2006/main">
               <a:ext uri="{FF2B5EF4-FFF2-40B4-BE49-F238E27FC236}">
-                <a16:creationId xmlns:a16="http://schemas.microsoft.com/office/drawing/2014/main" id="{0E8C0702-EF83-4FA1-9E2D-7188F6162F73}"/>
+                <a16:creationId xmlns:a16="http://schemas.microsoft.com/office/drawing/2014/main" id="{904FF138-FD04-40F5-BAB6-42199E82E34E}"/>
               </a:ext>
             </a:extLst>
           </p:cNvPr>
@@ -1488,7 +1488,7 @@
           <p:cNvPr id="4" name="">
             <a:extLst xmlns:a="http://schemas.openxmlformats.org/drawingml/2006/main">
               <a:ext uri="{FF2B5EF4-FFF2-40B4-BE49-F238E27FC236}">
-                <a16:creationId xmlns:a16="http://schemas.microsoft.com/office/drawing/2014/main" id="{BB82BB20-9527-4B70-9A03-66AE48630A3C}"/>
+                <a16:creationId xmlns:a16="http://schemas.microsoft.com/office/drawing/2014/main" id="{6A83C83E-260E-41EE-9CC0-B7E8783EC827}"/>
               </a:ext>
             </a:extLst>
           </p:cNvPr>
@@ -1521,7 +1521,7 @@
           <p:cNvPr id="5" name="">
             <a:extLst xmlns:a="http://schemas.openxmlformats.org/drawingml/2006/main">
               <a:ext uri="{FF2B5EF4-FFF2-40B4-BE49-F238E27FC236}">
-                <a16:creationId xmlns:a16="http://schemas.microsoft.com/office/drawing/2014/main" id="{2847572F-DCC2-40DC-8C7E-2E1B91C369A4}"/>
+                <a16:creationId xmlns:a16="http://schemas.microsoft.com/office/drawing/2014/main" id="{9136074F-4E06-4E47-91FB-5531A671B314}"/>
               </a:ext>
             </a:extLst>
           </p:cNvPr>
@@ -1571,7 +1571,7 @@
           <p:cNvPr id="6" name="">
             <a:extLst xmlns:a="http://schemas.openxmlformats.org/drawingml/2006/main">
               <a:ext uri="{FF2B5EF4-FFF2-40B4-BE49-F238E27FC236}">
-                <a16:creationId xmlns:a16="http://schemas.microsoft.com/office/drawing/2014/main" id="{FDF4CAAD-D7E1-4B95-8ADF-55D90BB14FF4}"/>
+                <a16:creationId xmlns:a16="http://schemas.microsoft.com/office/drawing/2014/main" id="{AF14BF27-7811-40FC-9E5D-B98DC555BB08}"/>
               </a:ext>
             </a:extLst>
           </p:cNvPr>
@@ -1621,7 +1621,7 @@
           <p:cNvPr id="7" name="">
             <a:extLst xmlns:a="http://schemas.openxmlformats.org/drawingml/2006/main">
               <a:ext uri="{FF2B5EF4-FFF2-40B4-BE49-F238E27FC236}">
-                <a16:creationId xmlns:a16="http://schemas.microsoft.com/office/drawing/2014/main" id="{B2930E47-13A1-4F0F-B29A-C5AF44A6B51B}"/>
+                <a16:creationId xmlns:a16="http://schemas.microsoft.com/office/drawing/2014/main" id="{33890134-7E40-4322-AFB7-B2B2B649B3A9}"/>
               </a:ext>
             </a:extLst>
           </p:cNvPr>
@@ -1656,7 +1656,7 @@
           <p:cNvPr id="8" name="">
             <a:extLst xmlns:a="http://schemas.openxmlformats.org/drawingml/2006/main">
               <a:ext uri="{FF2B5EF4-FFF2-40B4-BE49-F238E27FC236}">
-                <a16:creationId xmlns:a16="http://schemas.microsoft.com/office/drawing/2014/main" id="{4B97FC6F-A3CE-4C61-B437-6DC1701D88EF}"/>
+                <a16:creationId xmlns:a16="http://schemas.microsoft.com/office/drawing/2014/main" id="{D48F1D04-9FE3-4ACD-B71D-9EE4CFC10E9F}"/>
               </a:ext>
             </a:extLst>
           </p:cNvPr>
@@ -1689,7 +1689,7 @@
           <p:cNvPr id="9" name="">
             <a:extLst xmlns:a="http://schemas.openxmlformats.org/drawingml/2006/main">
               <a:ext uri="{FF2B5EF4-FFF2-40B4-BE49-F238E27FC236}">
-                <a16:creationId xmlns:a16="http://schemas.microsoft.com/office/drawing/2014/main" id="{EA8818DE-80C6-4D57-8BDD-70D689D68185}"/>
+                <a16:creationId xmlns:a16="http://schemas.microsoft.com/office/drawing/2014/main" id="{2F971DB7-C232-400F-9EFB-8A7DFC0B2870}"/>
               </a:ext>
             </a:extLst>
           </p:cNvPr>
@@ -1739,7 +1739,7 @@
           <p:cNvPr id="10" name="">
             <a:extLst xmlns:a="http://schemas.openxmlformats.org/drawingml/2006/main">
               <a:ext uri="{FF2B5EF4-FFF2-40B4-BE49-F238E27FC236}">
-                <a16:creationId xmlns:a16="http://schemas.microsoft.com/office/drawing/2014/main" id="{623390C2-02E1-47C4-9DBE-65DCA6DB86B9}"/>
+                <a16:creationId xmlns:a16="http://schemas.microsoft.com/office/drawing/2014/main" id="{81EAA959-B2AC-4226-B97C-A4C2826FE974}"/>
               </a:ext>
             </a:extLst>
           </p:cNvPr>
@@ -1789,7 +1789,7 @@
           <p:cNvPr id="11" name="">
             <a:extLst xmlns:a="http://schemas.openxmlformats.org/drawingml/2006/main">
               <a:ext uri="{FF2B5EF4-FFF2-40B4-BE49-F238E27FC236}">
-                <a16:creationId xmlns:a16="http://schemas.microsoft.com/office/drawing/2014/main" id="{EF0224DF-FF38-4438-BAEF-8B97F347C366}"/>
+                <a16:creationId xmlns:a16="http://schemas.microsoft.com/office/drawing/2014/main" id="{558C3FBE-A0FE-4D61-8C35-908E4BB49D22}"/>
               </a:ext>
             </a:extLst>
           </p:cNvPr>
@@ -1824,7 +1824,7 @@
           <p:cNvPr id="12" name="">
             <a:extLst xmlns:a="http://schemas.openxmlformats.org/drawingml/2006/main">
               <a:ext uri="{FF2B5EF4-FFF2-40B4-BE49-F238E27FC236}">
-                <a16:creationId xmlns:a16="http://schemas.microsoft.com/office/drawing/2014/main" id="{4B3BB788-8F63-4E52-B85C-B4EC56C776E5}"/>
+                <a16:creationId xmlns:a16="http://schemas.microsoft.com/office/drawing/2014/main" id="{38C1CF48-29A7-48CD-87A1-5EE26773BC20}"/>
               </a:ext>
             </a:extLst>
           </p:cNvPr>
@@ -1857,7 +1857,7 @@
           <p:cNvPr id="13" name="">
             <a:extLst xmlns:a="http://schemas.openxmlformats.org/drawingml/2006/main">
               <a:ext uri="{FF2B5EF4-FFF2-40B4-BE49-F238E27FC236}">
-                <a16:creationId xmlns:a16="http://schemas.microsoft.com/office/drawing/2014/main" id="{8829A967-74E8-46F9-824D-A66E277FDD00}"/>
+                <a16:creationId xmlns:a16="http://schemas.microsoft.com/office/drawing/2014/main" id="{1559BC60-14D0-4020-BAD7-8E9759B760BF}"/>
               </a:ext>
             </a:extLst>
           </p:cNvPr>
@@ -1907,7 +1907,7 @@
           <p:cNvPr id="14" name="">
             <a:extLst xmlns:a="http://schemas.openxmlformats.org/drawingml/2006/main">
               <a:ext uri="{FF2B5EF4-FFF2-40B4-BE49-F238E27FC236}">
-                <a16:creationId xmlns:a16="http://schemas.microsoft.com/office/drawing/2014/main" id="{F5E84983-EEEC-435D-975D-EA1FC126ED72}"/>
+                <a16:creationId xmlns:a16="http://schemas.microsoft.com/office/drawing/2014/main" id="{9A4FE954-E881-4F17-842F-48FC297062C8}"/>
               </a:ext>
             </a:extLst>
           </p:cNvPr>
@@ -1957,7 +1957,7 @@
           <p:cNvPr id="15" name="">
             <a:extLst xmlns:a="http://schemas.openxmlformats.org/drawingml/2006/main">
               <a:ext uri="{FF2B5EF4-FFF2-40B4-BE49-F238E27FC236}">
-                <a16:creationId xmlns:a16="http://schemas.microsoft.com/office/drawing/2014/main" id="{666A6B4D-B995-497A-B0E7-108C588D1770}"/>
+                <a16:creationId xmlns:a16="http://schemas.microsoft.com/office/drawing/2014/main" id="{5D16A5FF-E628-46BA-A1E7-724CE2B1D4FC}"/>
               </a:ext>
             </a:extLst>
           </p:cNvPr>
@@ -2045,7 +2045,7 @@
           <p:nvPr/>
         </p:nvPicPr>
         <p:blipFill>
-          <a:blip xmlns:r="http://schemas.openxmlformats.org/officeDocument/2006/relationships" xmlns:a="http://schemas.openxmlformats.org/drawingml/2006/main" r:embed="Rc541bcdb5fec4cab"/>
+          <a:blip xmlns:r="http://schemas.openxmlformats.org/officeDocument/2006/relationships" xmlns:a="http://schemas.openxmlformats.org/drawingml/2006/main" r:embed="R5f37136bdebb41eb"/>
           <a:stretch xmlns:a="http://schemas.openxmlformats.org/drawingml/2006/main"/>
         </p:blipFill>
         <p:spPr>
@@ -2063,7 +2063,7 @@
           <p:cNvPr id="17" name="">
             <a:extLst xmlns:a="http://schemas.openxmlformats.org/drawingml/2006/main">
               <a:ext uri="{FF2B5EF4-FFF2-40B4-BE49-F238E27FC236}">
-                <a16:creationId xmlns:a16="http://schemas.microsoft.com/office/drawing/2014/main" id="{3C11B523-782E-4C20-A029-893C9A3F5D5E}"/>
+                <a16:creationId xmlns:a16="http://schemas.microsoft.com/office/drawing/2014/main" id="{C06142B0-3C33-4F1A-9D91-6823F776BF19}"/>
               </a:ext>
             </a:extLst>
           </p:cNvPr>
@@ -2111,7 +2111,7 @@
     </p:spTree>
     <p:extLst>
       <p:ext uri="{BB962C8B-B14F-4D97-AF65-F5344CB8AC3E}">
-        <p14:creationId xmlns:p14="http://schemas.microsoft.com/office/powerpoint/2010/main" val="729144962"/>
+        <p14:creationId xmlns:p14="http://schemas.microsoft.com/office/powerpoint/2010/main" val="200127091"/>
       </p:ext>
     </p:extLst>
   </p:cSld>
@@ -2142,7 +2142,7 @@
           <p:cNvPr id="1" name="">
             <a:extLst xmlns:a="http://schemas.openxmlformats.org/drawingml/2006/main">
               <a:ext uri="{FF2B5EF4-FFF2-40B4-BE49-F238E27FC236}">
-                <a16:creationId xmlns:a16="http://schemas.microsoft.com/office/drawing/2014/main" id="{5098FB44-F649-4E73-9F92-EC0479D5B0C0}"/>
+                <a16:creationId xmlns:a16="http://schemas.microsoft.com/office/drawing/2014/main" id="{95D4136D-12F5-4A8C-B049-451BBE334BB7}"/>
               </a:ext>
             </a:extLst>
           </p:cNvPr>
@@ -2192,7 +2192,7 @@
           <p:cNvPr id="2" name="">
             <a:extLst xmlns:a="http://schemas.openxmlformats.org/drawingml/2006/main">
               <a:ext uri="{FF2B5EF4-FFF2-40B4-BE49-F238E27FC236}">
-                <a16:creationId xmlns:a16="http://schemas.microsoft.com/office/drawing/2014/main" id="{13B19851-2A00-4E20-9F25-C93806367288}"/>
+                <a16:creationId xmlns:a16="http://schemas.microsoft.com/office/drawing/2014/main" id="{5FECBEBC-BD6D-4B17-9055-F70D83CAF0A4}"/>
               </a:ext>
             </a:extLst>
           </p:cNvPr>
@@ -4400,7 +4400,7 @@
           <p:nvPr/>
         </p:nvPicPr>
         <p:blipFill>
-          <a:blip xmlns:r="http://schemas.openxmlformats.org/officeDocument/2006/relationships" xmlns:a="http://schemas.openxmlformats.org/drawingml/2006/main" r:embed="Rf0ada4d6626d408d"/>
+          <a:blip xmlns:r="http://schemas.openxmlformats.org/officeDocument/2006/relationships" xmlns:a="http://schemas.openxmlformats.org/drawingml/2006/main" r:embed="Ra96583f9685a47a8"/>
           <a:stretch xmlns:a="http://schemas.openxmlformats.org/drawingml/2006/main"/>
         </p:blipFill>
         <p:spPr>
@@ -4418,7 +4418,7 @@
           <p:cNvPr id="5" name="">
             <a:extLst xmlns:a="http://schemas.openxmlformats.org/drawingml/2006/main">
               <a:ext uri="{FF2B5EF4-FFF2-40B4-BE49-F238E27FC236}">
-                <a16:creationId xmlns:a16="http://schemas.microsoft.com/office/drawing/2014/main" id="{B5D96415-E043-4098-B800-F0DF3F4D150E}"/>
+                <a16:creationId xmlns:a16="http://schemas.microsoft.com/office/drawing/2014/main" id="{AC00F462-2EB7-48C2-88AA-37995A05DB8B}"/>
               </a:ext>
             </a:extLst>
           </p:cNvPr>
@@ -4485,7 +4485,7 @@
           <p:cNvPr id="6" name="">
             <a:extLst xmlns:a="http://schemas.openxmlformats.org/drawingml/2006/main">
               <a:ext uri="{FF2B5EF4-FFF2-40B4-BE49-F238E27FC236}">
-                <a16:creationId xmlns:a16="http://schemas.microsoft.com/office/drawing/2014/main" id="{20BB9DBF-E713-440B-AA6E-E1104E421784}"/>
+                <a16:creationId xmlns:a16="http://schemas.microsoft.com/office/drawing/2014/main" id="{0E42DB0F-AF61-423F-A61B-F971B044341C}"/>
               </a:ext>
             </a:extLst>
           </p:cNvPr>
@@ -4533,7 +4533,7 @@
     </p:spTree>
     <p:extLst>
       <p:ext uri="{BB962C8B-B14F-4D97-AF65-F5344CB8AC3E}">
-        <p14:creationId xmlns:p14="http://schemas.microsoft.com/office/powerpoint/2010/main" val="1431842094"/>
+        <p14:creationId xmlns:p14="http://schemas.microsoft.com/office/powerpoint/2010/main" val="579983891"/>
       </p:ext>
     </p:extLst>
   </p:cSld>
@@ -4564,7 +4564,7 @@
           <p:cNvPr id="1" name="">
             <a:extLst xmlns:a="http://schemas.openxmlformats.org/drawingml/2006/main">
               <a:ext uri="{FF2B5EF4-FFF2-40B4-BE49-F238E27FC236}">
-                <a16:creationId xmlns:a16="http://schemas.microsoft.com/office/drawing/2014/main" id="{C7496633-F2BC-48B4-B25C-115573CD3EB4}"/>
+                <a16:creationId xmlns:a16="http://schemas.microsoft.com/office/drawing/2014/main" id="{2F2B5BB2-531D-4021-98A8-5CE85AB6F706}"/>
               </a:ext>
             </a:extLst>
           </p:cNvPr>
@@ -4614,7 +4614,7 @@
           <p:cNvPr id="2" name="">
             <a:extLst xmlns:a="http://schemas.openxmlformats.org/drawingml/2006/main">
               <a:ext uri="{FF2B5EF4-FFF2-40B4-BE49-F238E27FC236}">
-                <a16:creationId xmlns:a16="http://schemas.microsoft.com/office/drawing/2014/main" id="{52309C02-7139-407A-8BFC-C6074EB42BFE}"/>
+                <a16:creationId xmlns:a16="http://schemas.microsoft.com/office/drawing/2014/main" id="{C1A38589-F287-4E95-B7CC-4DCA84371699}"/>
               </a:ext>
             </a:extLst>
           </p:cNvPr>
@@ -4668,7 +4668,7 @@
           <p:nvPr/>
         </p:nvPicPr>
         <p:blipFill>
-          <a:blip xmlns:r="http://schemas.openxmlformats.org/officeDocument/2006/relationships" xmlns:a="http://schemas.openxmlformats.org/drawingml/2006/main" r:embed="Ref9cb4b87d6f48a9"/>
+          <a:blip xmlns:r="http://schemas.openxmlformats.org/officeDocument/2006/relationships" xmlns:a="http://schemas.openxmlformats.org/drawingml/2006/main" r:embed="R2b49305dd6924759"/>
           <a:stretch xmlns:a="http://schemas.openxmlformats.org/drawingml/2006/main"/>
         </p:blipFill>
         <p:spPr>
@@ -4690,7 +4690,7 @@
           <p:nvPr/>
         </p:nvPicPr>
         <p:blipFill>
-          <a:blip xmlns:r="http://schemas.openxmlformats.org/officeDocument/2006/relationships" xmlns:a="http://schemas.openxmlformats.org/drawingml/2006/main" r:embed="Rf9e2be29bbe540e3"/>
+          <a:blip xmlns:r="http://schemas.openxmlformats.org/officeDocument/2006/relationships" xmlns:a="http://schemas.openxmlformats.org/drawingml/2006/main" r:embed="R2ba38bd0a6e14fb2"/>
           <a:stretch xmlns:a="http://schemas.openxmlformats.org/drawingml/2006/main"/>
         </p:blipFill>
         <p:spPr>
@@ -4708,7 +4708,7 @@
           <p:cNvPr id="5" name="">
             <a:extLst xmlns:a="http://schemas.openxmlformats.org/drawingml/2006/main">
               <a:ext uri="{FF2B5EF4-FFF2-40B4-BE49-F238E27FC236}">
-                <a16:creationId xmlns:a16="http://schemas.microsoft.com/office/drawing/2014/main" id="{DD567C6C-3073-4AB4-B795-E269F4055008}"/>
+                <a16:creationId xmlns:a16="http://schemas.microsoft.com/office/drawing/2014/main" id="{B3DB82AD-9810-469F-804E-2967D3A2E568}"/>
               </a:ext>
             </a:extLst>
           </p:cNvPr>
@@ -4758,7 +4758,7 @@
           <p:cNvPr id="6" name="">
             <a:extLst xmlns:a="http://schemas.openxmlformats.org/drawingml/2006/main">
               <a:ext uri="{FF2B5EF4-FFF2-40B4-BE49-F238E27FC236}">
-                <a16:creationId xmlns:a16="http://schemas.microsoft.com/office/drawing/2014/main" id="{6C2D174A-CBA1-4EF7-8A54-468031935161}"/>
+                <a16:creationId xmlns:a16="http://schemas.microsoft.com/office/drawing/2014/main" id="{2DED63FC-1AD1-4201-AB24-322C753A9D0B}"/>
               </a:ext>
             </a:extLst>
           </p:cNvPr>
@@ -4806,7 +4806,7 @@
     </p:spTree>
     <p:extLst>
       <p:ext uri="{BB962C8B-B14F-4D97-AF65-F5344CB8AC3E}">
-        <p14:creationId xmlns:p14="http://schemas.microsoft.com/office/powerpoint/2010/main" val="1519943752"/>
+        <p14:creationId xmlns:p14="http://schemas.microsoft.com/office/powerpoint/2010/main" val="2629714"/>
       </p:ext>
     </p:extLst>
   </p:cSld>
@@ -4837,7 +4837,7 @@
           <p:cNvPr id="1" name="">
             <a:extLst xmlns:a="http://schemas.openxmlformats.org/drawingml/2006/main">
               <a:ext uri="{FF2B5EF4-FFF2-40B4-BE49-F238E27FC236}">
-                <a16:creationId xmlns:a16="http://schemas.microsoft.com/office/drawing/2014/main" id="{04AEF5D9-CA13-403E-8CA0-E43FDDEA9E70}"/>
+                <a16:creationId xmlns:a16="http://schemas.microsoft.com/office/drawing/2014/main" id="{6083B8C6-67E4-4682-88AC-96679D383E18}"/>
               </a:ext>
             </a:extLst>
           </p:cNvPr>
@@ -4887,7 +4887,7 @@
           <p:cNvPr id="2" name="">
             <a:extLst xmlns:a="http://schemas.openxmlformats.org/drawingml/2006/main">
               <a:ext uri="{FF2B5EF4-FFF2-40B4-BE49-F238E27FC236}">
-                <a16:creationId xmlns:a16="http://schemas.microsoft.com/office/drawing/2014/main" id="{358B449B-C246-4A5A-9D3A-025B3F330674}"/>
+                <a16:creationId xmlns:a16="http://schemas.microsoft.com/office/drawing/2014/main" id="{6EA99F59-7634-4F13-81F4-BF7278A204F7}"/>
               </a:ext>
             </a:extLst>
           </p:cNvPr>
@@ -4937,7 +4937,7 @@
           <p:cNvPr id="3" name="">
             <a:extLst xmlns:a="http://schemas.openxmlformats.org/drawingml/2006/main">
               <a:ext uri="{FF2B5EF4-FFF2-40B4-BE49-F238E27FC236}">
-                <a16:creationId xmlns:a16="http://schemas.microsoft.com/office/drawing/2014/main" id="{F6F8E1FC-3923-490E-8B4F-A6FD192A0AF8}"/>
+                <a16:creationId xmlns:a16="http://schemas.microsoft.com/office/drawing/2014/main" id="{2DF24CDB-A75A-4D1F-9047-54EB5C5A630A}"/>
               </a:ext>
             </a:extLst>
           </p:cNvPr>
@@ -6274,7 +6274,7 @@
           <p:cNvPr id="6" name="">
             <a:extLst xmlns:a="http://schemas.openxmlformats.org/drawingml/2006/main">
               <a:ext uri="{FF2B5EF4-FFF2-40B4-BE49-F238E27FC236}">
-                <a16:creationId xmlns:a16="http://schemas.microsoft.com/office/drawing/2014/main" id="{C21AE5E0-CFFD-47F4-AFE9-E70B9C953A7E}"/>
+                <a16:creationId xmlns:a16="http://schemas.microsoft.com/office/drawing/2014/main" id="{22B94148-651C-4F2A-9CEE-1BEAA27E0356}"/>
               </a:ext>
             </a:extLst>
           </p:cNvPr>
@@ -6322,7 +6322,7 @@
     </p:spTree>
     <p:extLst>
       <p:ext uri="{BB962C8B-B14F-4D97-AF65-F5344CB8AC3E}">
-        <p14:creationId xmlns:p14="http://schemas.microsoft.com/office/powerpoint/2010/main" val="298583099"/>
+        <p14:creationId xmlns:p14="http://schemas.microsoft.com/office/powerpoint/2010/main" val="1359288038"/>
       </p:ext>
     </p:extLst>
   </p:cSld>
